--- a/slides/decks/s12-viral-ptld.pptx
+++ b/slides/decks/s12-viral-ptld.pptx
@@ -132,13 +132,13 @@
   <p:extLst>
     <p:ext uri="{521415D9-36F7-43E2-AB2F-B90AF26B5E84}">
       <p14:sectionLst xmlns:p14="http://schemas.microsoft.com/office/powerpoint/2010/main">
-        <p14:section name="Opening" id="{3dc80e70-10e3-ad7f-fd29-3807431b8a8b}">
+        <p14:section name="Opening" id="{5973c3e7-6994-f885-c5c7-fd1009d19fba}">
           <p14:sldIdLst>
             <p14:sldId id="256"/>
             <p14:sldId id="257"/>
           </p14:sldIdLst>
         </p14:section>
-        <p14:section name="CMV" id="{3111d29e-5d96-aea1-bdcc-abcc01675b7b}">
+        <p14:section name="CMV" id="{49ae1379-8844-0a50-30b8-d8351c4e2202}">
           <p14:sldIdLst>
             <p14:sldId id="258"/>
             <p14:sldId id="259"/>
@@ -146,20 +146,20 @@
             <p14:sldId id="261"/>
           </p14:sldIdLst>
         </p14:section>
-        <p14:section name="Other herpesviruses" id="{d1d7f70a-8e3b-8617-2190-d4344a9f2fcd}">
+        <p14:section name="Other herpesviruses" id="{741e234d-f01b-a8b3-6b7c-be8bf7ce01e3}">
           <p14:sldIdLst>
             <p14:sldId id="262"/>
             <p14:sldId id="263"/>
           </p14:sldIdLst>
         </p14:section>
-        <p14:section name="Respiratory viruses and adenovirus" id="{528f00a4-d5aa-74da-e893-f5c327e8ab0b}">
+        <p14:section name="Respiratory viruses and adenovirus" id="{8fde463f-1557-5714-7f18-7cb0b347ae99}">
           <p14:sldIdLst>
             <p14:sldId id="264"/>
             <p14:sldId id="265"/>
             <p14:sldId id="266"/>
           </p14:sldIdLst>
         </p14:section>
-        <p14:section name="EBV-PTLD" id="{a3907211-01b6-fa81-a991-c55f18ef9d8c}">
+        <p14:section name="EBV-PTLD" id="{db9545e5-41bf-774e-c812-1a9c7268b67b}">
           <p14:sldIdLst>
             <p14:sldId id="267"/>
             <p14:sldId id="268"/>
@@ -168,7 +168,7 @@
             <p14:sldId id="271"/>
           </p14:sldIdLst>
         </p14:section>
-        <p14:section name="Board questions" id="{9e85ea91-3150-af0b-546b-036f3319f18d}">
+        <p14:section name="Board questions" id="{131e03ff-5488-11ec-0e7a-3179dde302ce}">
           <p14:sldIdLst>
             <p14:sldId id="272"/>
             <p14:sldId id="273"/>
@@ -178,12 +178,12 @@
             <p14:sldId id="277"/>
           </p14:sldIdLst>
         </p14:section>
-        <p14:section name="References" id="{eacffc88-d204-e0ad-a630-52e891c72a35}">
+        <p14:section name="References" id="{ba7d9d2a-69a1-926e-32dc-00cbe3d77a93}">
           <p14:sldIdLst>
             <p14:sldId id="278"/>
           </p14:sldIdLst>
         </p14:section>
-        <p14:section name="Backup" id="{ccb1370e-a02d-f9db-acf2-a1c13b04cc72}">
+        <p14:section name="Backup" id="{e147eb71-4391-83d6-e141-7d94bfd358f3}">
           <p14:sldIdLst>
             <p14:sldId id="279"/>
             <p14:sldId id="280"/>
